--- a/Ghost_Job_Final_Presentation.pptx
+++ b/Ghost_Job_Final_Presentation.pptx
@@ -19188,7 +19188,7 @@
                   <a:srgbClr val="7BAF96"/>
                 </a:solidFill>
               </a:rPr>
-              <a:t>Carter Jaquette  ·  Nilabh Agrawal  ·  Zixi Lian</a:t>
+              <a:t>Nilabh Agrawal  ·  Carter Jaquette  ·  Zixi Lian</a:t>
             </a:r>
             <a:endParaRPr i="0" sz="1200" u="none" cap="none" strike="noStrike">
               <a:solidFill>
@@ -24364,7 +24364,7 @@
                   <a:srgbClr val="4E6057"/>
                 </a:solidFill>
               </a:rPr>
-              <a:t>Target: actual inflows Q+1  |  Train: 7,167 rows (813 firms)  |  Val: 884  |  Test: 886  |  </a:t>
+              <a:t xml:space="preserve">Target: actual inflows Q+1  |  Train: 7,167 rows (813 firms)  |  Val: 884  |  Test: 886  |  </a:t>
             </a:r>
             <a:endParaRPr i="0" sz="1050" u="none" cap="none" strike="noStrike">
               <a:solidFill>
@@ -29571,7 +29571,7 @@
                   <a:srgbClr val="005C3B"/>
                 </a:solidFill>
               </a:rPr>
-              <a:t>WALK-FORWARD BACKTEST </a:t>
+              <a:t xml:space="preserve">WALK-FORWARD BACKTEST </a:t>
             </a:r>
             <a:r>
               <a:rPr b="1" lang="en-US" sz="1800">
@@ -29935,7 +29935,7 @@
                   <a:srgbClr val="002145"/>
                 </a:solidFill>
               </a:rPr>
-              <a:t>1.  </a:t>
+              <a:t xml:space="preserve">1.  </a:t>
             </a:r>
             <a:r>
               <a:rPr b="1" lang="en-US" sz="1150">
@@ -30109,7 +30109,7 @@
                   <a:srgbClr val="1F6095"/>
                 </a:solidFill>
               </a:rPr>
-              <a:t>2.  </a:t>
+              <a:t xml:space="preserve">2.  </a:t>
             </a:r>
             <a:r>
               <a:rPr b="1" lang="en-US" sz="1150">
@@ -30332,7 +30332,7 @@
                   <a:srgbClr val="005C3B"/>
                 </a:solidFill>
               </a:rPr>
-              <a:t>3.  </a:t>
+              <a:t xml:space="preserve">3.  </a:t>
             </a:r>
             <a:r>
               <a:rPr b="1" lang="en-US" sz="1150">
@@ -30579,7 +30579,7 @@
                   <a:srgbClr val="007A52"/>
                 </a:solidFill>
               </a:rPr>
-              <a:t>4.  </a:t>
+              <a:t xml:space="preserve">4.  </a:t>
             </a:r>
             <a:r>
               <a:rPr b="1" lang="en-US" sz="1150">
@@ -49258,7 +49258,7 @@
                   <a:srgbClr val="D4EDE2"/>
                 </a:solidFill>
               </a:rPr>
-              <a:t>Ghost Intensity Signal: </a:t>
+              <a:t xml:space="preserve">Ghost Intensity Signal: </a:t>
             </a:r>
             <a:endParaRPr i="0" sz="1100" u="none" cap="none" strike="noStrike">
               <a:solidFill>
@@ -49417,7 +49417,7 @@
                   <a:srgbClr val="D4EDE2"/>
                 </a:solidFill>
               </a:rPr>
-              <a:t>Walk-Forward Backtest: </a:t>
+              <a:t xml:space="preserve">Walk-Forward Backtest: </a:t>
             </a:r>
             <a:endParaRPr i="0" sz="1100" u="none" cap="none" strike="noStrike">
               <a:solidFill>
@@ -49576,7 +49576,7 @@
                   <a:srgbClr val="D4EDE2"/>
                 </a:solidFill>
               </a:rPr>
-              <a:t>GMM Validation: </a:t>
+              <a:t xml:space="preserve">GMM Validation: </a:t>
             </a:r>
             <a:endParaRPr i="0" sz="1100" u="none" cap="none" strike="noStrike">
               <a:solidFill>
@@ -49735,7 +49735,7 @@
                   <a:srgbClr val="D4EDE2"/>
                 </a:solidFill>
               </a:rPr>
-              <a:t>Ghost Premium Explanation: </a:t>
+              <a:t xml:space="preserve">Ghost Premium Explanation: </a:t>
             </a:r>
             <a:endParaRPr i="0" sz="1100" u="none" cap="none" strike="noStrike">
               <a:solidFill>
@@ -53512,7 +53512,7 @@
                   <a:srgbClr val="002145"/>
                 </a:solidFill>
               </a:rPr>
-              <a:t>Finding: </a:t>
+              <a:t xml:space="preserve">Finding: </a:t>
             </a:r>
             <a:r>
               <a:rPr i="0" lang="en-US" sz="1050" u="none" cap="none" strike="noStrike">
@@ -53575,7 +53575,7 @@
                   <a:srgbClr val="002145"/>
                 </a:solidFill>
               </a:rPr>
-              <a:t>Gap: </a:t>
+              <a:t xml:space="preserve">Gap: </a:t>
             </a:r>
             <a:r>
               <a:rPr i="1" lang="en-US" sz="1050" u="none" cap="none" strike="noStrike">
@@ -54171,7 +54171,7 @@
                   <a:srgbClr val="002145"/>
                 </a:solidFill>
               </a:rPr>
-              <a:t>Finding: </a:t>
+              <a:t xml:space="preserve">Finding: </a:t>
             </a:r>
             <a:r>
               <a:rPr i="0" lang="en-US" sz="1050" u="none" cap="none" strike="noStrike">
@@ -54234,7 +54234,7 @@
                   <a:srgbClr val="002145"/>
                 </a:solidFill>
               </a:rPr>
-              <a:t>Gap: </a:t>
+              <a:t xml:space="preserve">Gap: </a:t>
             </a:r>
             <a:r>
               <a:rPr i="1" lang="en-US" sz="1050" u="none" cap="none" strike="noStrike">
@@ -54867,7 +54867,7 @@
                   <a:srgbClr val="002145"/>
                 </a:solidFill>
               </a:rPr>
-              <a:t>Finding: </a:t>
+              <a:t xml:space="preserve">Finding: </a:t>
             </a:r>
             <a:r>
               <a:rPr i="0" lang="en-US" sz="1050" u="none" cap="none" strike="noStrike">
@@ -54930,7 +54930,7 @@
                   <a:srgbClr val="002145"/>
                 </a:solidFill>
               </a:rPr>
-              <a:t>Gap: </a:t>
+              <a:t xml:space="preserve">Gap: </a:t>
             </a:r>
             <a:r>
               <a:rPr i="1" lang="en-US" sz="1050" u="none" cap="none" strike="noStrike">
@@ -57251,7 +57251,7 @@
                   <a:srgbClr val="1A2618"/>
                 </a:solidFill>
               </a:rPr>
-              <a:t>(i, t)  =  1  −  </a:t>
+              <a:t xml:space="preserve">(i, t)  =  1  −  </a:t>
             </a:r>
             <a:r>
               <a:rPr lang="en-US" u="none" cap="none" strike="noStrike">
@@ -57267,7 +57267,7 @@
                   <a:srgbClr val="1A2618"/>
                 </a:solidFill>
               </a:rPr>
-              <a:t> [ </a:t>
+              <a:t xml:space="preserve"> [ </a:t>
             </a:r>
             <a:r>
               <a:rPr b="1" lang="en-US" u="none" cap="none" strike="noStrike">
@@ -57354,7 +57354,7 @@
                   <a:srgbClr val="4E6057"/>
                 </a:solidFill>
               </a:rPr>
-              <a:t>   predicting inflows at  t + 1  [no lookahead]</a:t>
+              <a:t xml:space="preserve">   predicting inflows at  t + 1  [no lookahead]</a:t>
             </a:r>
             <a:endParaRPr u="none" cap="none" strike="noStrike">
               <a:solidFill>
